--- a/deliverables/intelligent-telco/The Intelligent Telco Infographic Presentation.pptx
+++ b/deliverables/intelligent-telco/The Intelligent Telco Infographic Presentation.pptx
@@ -5,13 +5,13 @@
     <p:sldMasterId id="2147483648" r:id="rId1"/>
   </p:sldMasterIdLst>
   <p:sldIdLst>
-    <p:sldId id="256" r:id="rId7"/>
-    <p:sldId id="257" r:id="rId8"/>
-    <p:sldId id="258" r:id="rId9"/>
-    <p:sldId id="259" r:id="rId10"/>
-    <p:sldId id="260" r:id="rId11"/>
+    <p:sldId id="256" r:id="rId2"/>
+    <p:sldId id="257" r:id="rId3"/>
+    <p:sldId id="258" r:id="rId4"/>
+    <p:sldId id="259" r:id="rId5"/>
+    <p:sldId id="260" r:id="rId6"/>
   </p:sldIdLst>
-  <p:sldSz cx="12191695" cy="6858000" type="screen4x3"/>
+  <p:sldSz cx="12192000" cy="6858000"/>
   <p:notesSz cx="6858000" cy="9144000"/>
   <p:defaultTextStyle>
     <a:defPPr>
@@ -108,6 +108,22 @@
       </a:defRPr>
     </a:lvl9pPr>
   </p:defaultTextStyle>
+  <p:extLst>
+    <p:ext uri="{EFAFB233-063F-42B5-8137-9DF3F51BA10A}">
+      <p15:sldGuideLst xmlns:p15="http://schemas.microsoft.com/office/powerpoint/2012/main">
+        <p15:guide id="1" orient="horz" pos="2160">
+          <p15:clr>
+            <a:srgbClr val="A4A3A4"/>
+          </p15:clr>
+        </p15:guide>
+        <p15:guide id="2" pos="2880">
+          <p15:clr>
+            <a:srgbClr val="A4A3A4"/>
+          </p15:clr>
+        </p15:guide>
+      </p15:sldGuideLst>
+    </p:ext>
+  </p:extLst>
 </p:presentation>
 </file>
 
@@ -149,10 +165,9 @@
           <a:lstStyle/>
           <a:p>
             <a:r>
-              <a:rPr lang="en-US" smtClean="0"/>
+              <a:rPr lang="en-US"/>
               <a:t>Click to edit Master title style</a:t>
             </a:r>
-            <a:endParaRPr lang="en-US"/>
           </a:p>
         </p:txBody>
       </p:sp>
@@ -268,10 +283,9 @@
           </a:lstStyle>
           <a:p>
             <a:r>
-              <a:rPr lang="en-US" smtClean="0"/>
+              <a:rPr lang="en-US"/>
               <a:t>Click to edit Master subtitle style</a:t>
             </a:r>
-            <a:endParaRPr lang="en-US"/>
           </a:p>
         </p:txBody>
       </p:sp>
@@ -292,7 +306,7 @@
           <a:p>
             <a:fld id="{5BCAD085-E8A6-8845-BD4E-CB4CCA059FC4}" type="datetimeFigureOut">
               <a:rPr lang="en-US" smtClean="0"/>
-              <a:t>1/27/13</a:t>
+              <a:t>10/7/2026</a:t>
             </a:fld>
             <a:endParaRPr lang="en-US"/>
           </a:p>
@@ -386,10 +400,9 @@
           <a:lstStyle/>
           <a:p>
             <a:r>
-              <a:rPr lang="en-US" smtClean="0"/>
+              <a:rPr lang="en-US"/>
               <a:t>Click to edit Master title style</a:t>
             </a:r>
-            <a:endParaRPr lang="en-US"/>
           </a:p>
         </p:txBody>
       </p:sp>
@@ -410,38 +423,37 @@
           <a:p>
             <a:pPr lvl="0"/>
             <a:r>
-              <a:rPr lang="en-US" smtClean="0"/>
+              <a:rPr lang="en-US"/>
               <a:t>Click to edit Master text styles</a:t>
             </a:r>
           </a:p>
           <a:p>
             <a:pPr lvl="1"/>
             <a:r>
-              <a:rPr lang="en-US" smtClean="0"/>
+              <a:rPr lang="en-US"/>
               <a:t>Second level</a:t>
             </a:r>
           </a:p>
           <a:p>
             <a:pPr lvl="2"/>
             <a:r>
-              <a:rPr lang="en-US" smtClean="0"/>
+              <a:rPr lang="en-US"/>
               <a:t>Third level</a:t>
             </a:r>
           </a:p>
           <a:p>
             <a:pPr lvl="3"/>
             <a:r>
-              <a:rPr lang="en-US" smtClean="0"/>
+              <a:rPr lang="en-US"/>
               <a:t>Fourth level</a:t>
             </a:r>
           </a:p>
           <a:p>
             <a:pPr lvl="4"/>
             <a:r>
-              <a:rPr lang="en-US" smtClean="0"/>
+              <a:rPr lang="en-US"/>
               <a:t>Fifth level</a:t>
             </a:r>
-            <a:endParaRPr lang="en-US"/>
           </a:p>
         </p:txBody>
       </p:sp>
@@ -462,7 +474,7 @@
           <a:p>
             <a:fld id="{5BCAD085-E8A6-8845-BD4E-CB4CCA059FC4}" type="datetimeFigureOut">
               <a:rPr lang="en-US" smtClean="0"/>
-              <a:t>1/27/13</a:t>
+              <a:t>10/7/2026</a:t>
             </a:fld>
             <a:endParaRPr lang="en-US"/>
           </a:p>
@@ -561,10 +573,9 @@
           <a:lstStyle/>
           <a:p>
             <a:r>
-              <a:rPr lang="en-US" smtClean="0"/>
+              <a:rPr lang="en-US"/>
               <a:t>Click to edit Master title style</a:t>
             </a:r>
-            <a:endParaRPr lang="en-US"/>
           </a:p>
         </p:txBody>
       </p:sp>
@@ -590,38 +601,37 @@
           <a:p>
             <a:pPr lvl="0"/>
             <a:r>
-              <a:rPr lang="en-US" smtClean="0"/>
+              <a:rPr lang="en-US"/>
               <a:t>Click to edit Master text styles</a:t>
             </a:r>
           </a:p>
           <a:p>
             <a:pPr lvl="1"/>
             <a:r>
-              <a:rPr lang="en-US" smtClean="0"/>
+              <a:rPr lang="en-US"/>
               <a:t>Second level</a:t>
             </a:r>
           </a:p>
           <a:p>
             <a:pPr lvl="2"/>
             <a:r>
-              <a:rPr lang="en-US" smtClean="0"/>
+              <a:rPr lang="en-US"/>
               <a:t>Third level</a:t>
             </a:r>
           </a:p>
           <a:p>
             <a:pPr lvl="3"/>
             <a:r>
-              <a:rPr lang="en-US" smtClean="0"/>
+              <a:rPr lang="en-US"/>
               <a:t>Fourth level</a:t>
             </a:r>
           </a:p>
           <a:p>
             <a:pPr lvl="4"/>
             <a:r>
-              <a:rPr lang="en-US" smtClean="0"/>
+              <a:rPr lang="en-US"/>
               <a:t>Fifth level</a:t>
             </a:r>
-            <a:endParaRPr lang="en-US"/>
           </a:p>
         </p:txBody>
       </p:sp>
@@ -642,7 +652,7 @@
           <a:p>
             <a:fld id="{5BCAD085-E8A6-8845-BD4E-CB4CCA059FC4}" type="datetimeFigureOut">
               <a:rPr lang="en-US" smtClean="0"/>
-              <a:t>1/27/13</a:t>
+              <a:t>10/7/2026</a:t>
             </a:fld>
             <a:endParaRPr lang="en-US"/>
           </a:p>
@@ -736,10 +746,9 @@
           <a:lstStyle/>
           <a:p>
             <a:r>
-              <a:rPr lang="en-US" smtClean="0"/>
+              <a:rPr lang="en-US"/>
               <a:t>Click to edit Master title style</a:t>
             </a:r>
-            <a:endParaRPr lang="en-US"/>
           </a:p>
         </p:txBody>
       </p:sp>
@@ -760,38 +769,37 @@
           <a:p>
             <a:pPr lvl="0"/>
             <a:r>
-              <a:rPr lang="en-US" smtClean="0"/>
+              <a:rPr lang="en-US"/>
               <a:t>Click to edit Master text styles</a:t>
             </a:r>
           </a:p>
           <a:p>
             <a:pPr lvl="1"/>
             <a:r>
-              <a:rPr lang="en-US" smtClean="0"/>
+              <a:rPr lang="en-US"/>
               <a:t>Second level</a:t>
             </a:r>
           </a:p>
           <a:p>
             <a:pPr lvl="2"/>
             <a:r>
-              <a:rPr lang="en-US" smtClean="0"/>
+              <a:rPr lang="en-US"/>
               <a:t>Third level</a:t>
             </a:r>
           </a:p>
           <a:p>
             <a:pPr lvl="3"/>
             <a:r>
-              <a:rPr lang="en-US" smtClean="0"/>
+              <a:rPr lang="en-US"/>
               <a:t>Fourth level</a:t>
             </a:r>
           </a:p>
           <a:p>
             <a:pPr lvl="4"/>
             <a:r>
-              <a:rPr lang="en-US" smtClean="0"/>
+              <a:rPr lang="en-US"/>
               <a:t>Fifth level</a:t>
             </a:r>
-            <a:endParaRPr lang="en-US"/>
           </a:p>
         </p:txBody>
       </p:sp>
@@ -812,7 +820,7 @@
           <a:p>
             <a:fld id="{5BCAD085-E8A6-8845-BD4E-CB4CCA059FC4}" type="datetimeFigureOut">
               <a:rPr lang="en-US" smtClean="0"/>
-              <a:t>1/27/13</a:t>
+              <a:t>10/7/2026</a:t>
             </a:fld>
             <a:endParaRPr lang="en-US"/>
           </a:p>
@@ -915,10 +923,9 @@
           </a:lstStyle>
           <a:p>
             <a:r>
-              <a:rPr lang="en-US" smtClean="0"/>
+              <a:rPr lang="en-US"/>
               <a:t>Click to edit Master title style</a:t>
             </a:r>
-            <a:endParaRPr lang="en-US"/>
           </a:p>
         </p:txBody>
       </p:sp>
@@ -1035,7 +1042,7 @@
           <a:p>
             <a:pPr lvl="0"/>
             <a:r>
-              <a:rPr lang="en-US" smtClean="0"/>
+              <a:rPr lang="en-US"/>
               <a:t>Click to edit Master text styles</a:t>
             </a:r>
           </a:p>
@@ -1058,7 +1065,7 @@
           <a:p>
             <a:fld id="{5BCAD085-E8A6-8845-BD4E-CB4CCA059FC4}" type="datetimeFigureOut">
               <a:rPr lang="en-US" smtClean="0"/>
-              <a:t>1/27/13</a:t>
+              <a:t>10/7/2026</a:t>
             </a:fld>
             <a:endParaRPr lang="en-US"/>
           </a:p>
@@ -1152,10 +1159,9 @@
           <a:lstStyle/>
           <a:p>
             <a:r>
-              <a:rPr lang="en-US" smtClean="0"/>
+              <a:rPr lang="en-US"/>
               <a:t>Click to edit Master title style</a:t>
             </a:r>
-            <a:endParaRPr lang="en-US"/>
           </a:p>
         </p:txBody>
       </p:sp>
@@ -1209,38 +1215,37 @@
           <a:p>
             <a:pPr lvl="0"/>
             <a:r>
-              <a:rPr lang="en-US" smtClean="0"/>
+              <a:rPr lang="en-US"/>
               <a:t>Click to edit Master text styles</a:t>
             </a:r>
           </a:p>
           <a:p>
             <a:pPr lvl="1"/>
             <a:r>
-              <a:rPr lang="en-US" smtClean="0"/>
+              <a:rPr lang="en-US"/>
               <a:t>Second level</a:t>
             </a:r>
           </a:p>
           <a:p>
             <a:pPr lvl="2"/>
             <a:r>
-              <a:rPr lang="en-US" smtClean="0"/>
+              <a:rPr lang="en-US"/>
               <a:t>Third level</a:t>
             </a:r>
           </a:p>
           <a:p>
             <a:pPr lvl="3"/>
             <a:r>
-              <a:rPr lang="en-US" smtClean="0"/>
+              <a:rPr lang="en-US"/>
               <a:t>Fourth level</a:t>
             </a:r>
           </a:p>
           <a:p>
             <a:pPr lvl="4"/>
             <a:r>
-              <a:rPr lang="en-US" smtClean="0"/>
+              <a:rPr lang="en-US"/>
               <a:t>Fifth level</a:t>
             </a:r>
-            <a:endParaRPr lang="en-US"/>
           </a:p>
         </p:txBody>
       </p:sp>
@@ -1294,38 +1299,37 @@
           <a:p>
             <a:pPr lvl="0"/>
             <a:r>
-              <a:rPr lang="en-US" smtClean="0"/>
+              <a:rPr lang="en-US"/>
               <a:t>Click to edit Master text styles</a:t>
             </a:r>
           </a:p>
           <a:p>
             <a:pPr lvl="1"/>
             <a:r>
-              <a:rPr lang="en-US" smtClean="0"/>
+              <a:rPr lang="en-US"/>
               <a:t>Second level</a:t>
             </a:r>
           </a:p>
           <a:p>
             <a:pPr lvl="2"/>
             <a:r>
-              <a:rPr lang="en-US" smtClean="0"/>
+              <a:rPr lang="en-US"/>
               <a:t>Third level</a:t>
             </a:r>
           </a:p>
           <a:p>
             <a:pPr lvl="3"/>
             <a:r>
-              <a:rPr lang="en-US" smtClean="0"/>
+              <a:rPr lang="en-US"/>
               <a:t>Fourth level</a:t>
             </a:r>
           </a:p>
           <a:p>
             <a:pPr lvl="4"/>
             <a:r>
-              <a:rPr lang="en-US" smtClean="0"/>
+              <a:rPr lang="en-US"/>
               <a:t>Fifth level</a:t>
             </a:r>
-            <a:endParaRPr lang="en-US"/>
           </a:p>
         </p:txBody>
       </p:sp>
@@ -1346,7 +1350,7 @@
           <a:p>
             <a:fld id="{5BCAD085-E8A6-8845-BD4E-CB4CCA059FC4}" type="datetimeFigureOut">
               <a:rPr lang="en-US" smtClean="0"/>
-              <a:t>1/27/13</a:t>
+              <a:t>10/7/2026</a:t>
             </a:fld>
             <a:endParaRPr lang="en-US"/>
           </a:p>
@@ -1444,10 +1448,9 @@
           </a:lstStyle>
           <a:p>
             <a:r>
-              <a:rPr lang="en-US" smtClean="0"/>
+              <a:rPr lang="en-US"/>
               <a:t>Click to edit Master title style</a:t>
             </a:r>
-            <a:endParaRPr lang="en-US"/>
           </a:p>
         </p:txBody>
       </p:sp>
@@ -1510,7 +1513,7 @@
           <a:p>
             <a:pPr lvl="0"/>
             <a:r>
-              <a:rPr lang="en-US" smtClean="0"/>
+              <a:rPr lang="en-US"/>
               <a:t>Click to edit Master text styles</a:t>
             </a:r>
           </a:p>
@@ -1566,38 +1569,37 @@
           <a:p>
             <a:pPr lvl="0"/>
             <a:r>
-              <a:rPr lang="en-US" smtClean="0"/>
+              <a:rPr lang="en-US"/>
               <a:t>Click to edit Master text styles</a:t>
             </a:r>
           </a:p>
           <a:p>
             <a:pPr lvl="1"/>
             <a:r>
-              <a:rPr lang="en-US" smtClean="0"/>
+              <a:rPr lang="en-US"/>
               <a:t>Second level</a:t>
             </a:r>
           </a:p>
           <a:p>
             <a:pPr lvl="2"/>
             <a:r>
-              <a:rPr lang="en-US" smtClean="0"/>
+              <a:rPr lang="en-US"/>
               <a:t>Third level</a:t>
             </a:r>
           </a:p>
           <a:p>
             <a:pPr lvl="3"/>
             <a:r>
-              <a:rPr lang="en-US" smtClean="0"/>
+              <a:rPr lang="en-US"/>
               <a:t>Fourth level</a:t>
             </a:r>
           </a:p>
           <a:p>
             <a:pPr lvl="4"/>
             <a:r>
-              <a:rPr lang="en-US" smtClean="0"/>
+              <a:rPr lang="en-US"/>
               <a:t>Fifth level</a:t>
             </a:r>
-            <a:endParaRPr lang="en-US"/>
           </a:p>
         </p:txBody>
       </p:sp>
@@ -1660,7 +1662,7 @@
           <a:p>
             <a:pPr lvl="0"/>
             <a:r>
-              <a:rPr lang="en-US" smtClean="0"/>
+              <a:rPr lang="en-US"/>
               <a:t>Click to edit Master text styles</a:t>
             </a:r>
           </a:p>
@@ -1716,38 +1718,37 @@
           <a:p>
             <a:pPr lvl="0"/>
             <a:r>
-              <a:rPr lang="en-US" smtClean="0"/>
+              <a:rPr lang="en-US"/>
               <a:t>Click to edit Master text styles</a:t>
             </a:r>
           </a:p>
           <a:p>
             <a:pPr lvl="1"/>
             <a:r>
-              <a:rPr lang="en-US" smtClean="0"/>
+              <a:rPr lang="en-US"/>
               <a:t>Second level</a:t>
             </a:r>
           </a:p>
           <a:p>
             <a:pPr lvl="2"/>
             <a:r>
-              <a:rPr lang="en-US" smtClean="0"/>
+              <a:rPr lang="en-US"/>
               <a:t>Third level</a:t>
             </a:r>
           </a:p>
           <a:p>
             <a:pPr lvl="3"/>
             <a:r>
-              <a:rPr lang="en-US" smtClean="0"/>
+              <a:rPr lang="en-US"/>
               <a:t>Fourth level</a:t>
             </a:r>
           </a:p>
           <a:p>
             <a:pPr lvl="4"/>
             <a:r>
-              <a:rPr lang="en-US" smtClean="0"/>
+              <a:rPr lang="en-US"/>
               <a:t>Fifth level</a:t>
             </a:r>
-            <a:endParaRPr lang="en-US"/>
           </a:p>
         </p:txBody>
       </p:sp>
@@ -1768,7 +1769,7 @@
           <a:p>
             <a:fld id="{5BCAD085-E8A6-8845-BD4E-CB4CCA059FC4}" type="datetimeFigureOut">
               <a:rPr lang="en-US" smtClean="0"/>
-              <a:t>1/27/13</a:t>
+              <a:t>10/7/2026</a:t>
             </a:fld>
             <a:endParaRPr lang="en-US"/>
           </a:p>
@@ -1862,10 +1863,9 @@
           <a:lstStyle/>
           <a:p>
             <a:r>
-              <a:rPr lang="en-US" smtClean="0"/>
+              <a:rPr lang="en-US"/>
               <a:t>Click to edit Master title style</a:t>
             </a:r>
-            <a:endParaRPr lang="en-US"/>
           </a:p>
         </p:txBody>
       </p:sp>
@@ -1886,7 +1886,7 @@
           <a:p>
             <a:fld id="{5BCAD085-E8A6-8845-BD4E-CB4CCA059FC4}" type="datetimeFigureOut">
               <a:rPr lang="en-US" smtClean="0"/>
-              <a:t>1/27/13</a:t>
+              <a:t>10/7/2026</a:t>
             </a:fld>
             <a:endParaRPr lang="en-US"/>
           </a:p>
@@ -1981,7 +1981,7 @@
           <a:p>
             <a:fld id="{5BCAD085-E8A6-8845-BD4E-CB4CCA059FC4}" type="datetimeFigureOut">
               <a:rPr lang="en-US" smtClean="0"/>
-              <a:t>1/27/13</a:t>
+              <a:t>10/7/2026</a:t>
             </a:fld>
             <a:endParaRPr lang="en-US"/>
           </a:p>
@@ -2084,10 +2084,9 @@
           </a:lstStyle>
           <a:p>
             <a:r>
-              <a:rPr lang="en-US" smtClean="0"/>
+              <a:rPr lang="en-US"/>
               <a:t>Click to edit Master title style</a:t>
             </a:r>
-            <a:endParaRPr lang="en-US"/>
           </a:p>
         </p:txBody>
       </p:sp>
@@ -2141,38 +2140,37 @@
           <a:p>
             <a:pPr lvl="0"/>
             <a:r>
-              <a:rPr lang="en-US" smtClean="0"/>
+              <a:rPr lang="en-US"/>
               <a:t>Click to edit Master text styles</a:t>
             </a:r>
           </a:p>
           <a:p>
             <a:pPr lvl="1"/>
             <a:r>
-              <a:rPr lang="en-US" smtClean="0"/>
+              <a:rPr lang="en-US"/>
               <a:t>Second level</a:t>
             </a:r>
           </a:p>
           <a:p>
             <a:pPr lvl="2"/>
             <a:r>
-              <a:rPr lang="en-US" smtClean="0"/>
+              <a:rPr lang="en-US"/>
               <a:t>Third level</a:t>
             </a:r>
           </a:p>
           <a:p>
             <a:pPr lvl="3"/>
             <a:r>
-              <a:rPr lang="en-US" smtClean="0"/>
+              <a:rPr lang="en-US"/>
               <a:t>Fourth level</a:t>
             </a:r>
           </a:p>
           <a:p>
             <a:pPr lvl="4"/>
             <a:r>
-              <a:rPr lang="en-US" smtClean="0"/>
+              <a:rPr lang="en-US"/>
               <a:t>Fifth level</a:t>
             </a:r>
-            <a:endParaRPr lang="en-US"/>
           </a:p>
         </p:txBody>
       </p:sp>
@@ -2235,7 +2233,7 @@
           <a:p>
             <a:pPr lvl="0"/>
             <a:r>
-              <a:rPr lang="en-US" smtClean="0"/>
+              <a:rPr lang="en-US"/>
               <a:t>Click to edit Master text styles</a:t>
             </a:r>
           </a:p>
@@ -2258,7 +2256,7 @@
           <a:p>
             <a:fld id="{5BCAD085-E8A6-8845-BD4E-CB4CCA059FC4}" type="datetimeFigureOut">
               <a:rPr lang="en-US" smtClean="0"/>
-              <a:t>1/27/13</a:t>
+              <a:t>10/7/2026</a:t>
             </a:fld>
             <a:endParaRPr lang="en-US"/>
           </a:p>
@@ -2361,10 +2359,9 @@
           </a:lstStyle>
           <a:p>
             <a:r>
-              <a:rPr lang="en-US" smtClean="0"/>
+              <a:rPr lang="en-US"/>
               <a:t>Click to edit Master title style</a:t>
             </a:r>
-            <a:endParaRPr lang="en-US"/>
           </a:p>
         </p:txBody>
       </p:sp>
@@ -2488,7 +2485,7 @@
           <a:p>
             <a:pPr lvl="0"/>
             <a:r>
-              <a:rPr lang="en-US" smtClean="0"/>
+              <a:rPr lang="en-US"/>
               <a:t>Click to edit Master text styles</a:t>
             </a:r>
           </a:p>
@@ -2511,7 +2508,7 @@
           <a:p>
             <a:fld id="{5BCAD085-E8A6-8845-BD4E-CB4CCA059FC4}" type="datetimeFigureOut">
               <a:rPr lang="en-US" smtClean="0"/>
-              <a:t>1/27/13</a:t>
+              <a:t>10/7/2026</a:t>
             </a:fld>
             <a:endParaRPr lang="en-US"/>
           </a:p>
@@ -2620,10 +2617,9 @@
           <a:lstStyle/>
           <a:p>
             <a:r>
-              <a:rPr lang="en-US" smtClean="0"/>
+              <a:rPr lang="en-US"/>
               <a:t>Click to edit Master title style</a:t>
             </a:r>
-            <a:endParaRPr lang="en-US"/>
           </a:p>
         </p:txBody>
       </p:sp>
@@ -2654,38 +2650,37 @@
           <a:p>
             <a:pPr lvl="0"/>
             <a:r>
-              <a:rPr lang="en-US" smtClean="0"/>
+              <a:rPr lang="en-US"/>
               <a:t>Click to edit Master text styles</a:t>
             </a:r>
           </a:p>
           <a:p>
             <a:pPr lvl="1"/>
             <a:r>
-              <a:rPr lang="en-US" smtClean="0"/>
+              <a:rPr lang="en-US"/>
               <a:t>Second level</a:t>
             </a:r>
           </a:p>
           <a:p>
             <a:pPr lvl="2"/>
             <a:r>
-              <a:rPr lang="en-US" smtClean="0"/>
+              <a:rPr lang="en-US"/>
               <a:t>Third level</a:t>
             </a:r>
           </a:p>
           <a:p>
             <a:pPr lvl="3"/>
             <a:r>
-              <a:rPr lang="en-US" smtClean="0"/>
+              <a:rPr lang="en-US"/>
               <a:t>Fourth level</a:t>
             </a:r>
           </a:p>
           <a:p>
             <a:pPr lvl="4"/>
             <a:r>
-              <a:rPr lang="en-US" smtClean="0"/>
+              <a:rPr lang="en-US"/>
               <a:t>Fifth level</a:t>
             </a:r>
-            <a:endParaRPr lang="en-US"/>
           </a:p>
         </p:txBody>
       </p:sp>
@@ -2724,7 +2719,7 @@
           <a:p>
             <a:fld id="{5BCAD085-E8A6-8845-BD4E-CB4CCA059FC4}" type="datetimeFigureOut">
               <a:rPr lang="en-US" smtClean="0"/>
-              <a:t>1/27/13</a:t>
+              <a:t>10/7/2026</a:t>
             </a:fld>
             <a:endParaRPr lang="en-US"/>
           </a:p>
@@ -3083,7 +3078,7 @@
 </file>
 
 <file path=ppt/slides/slide1.xml><?xml version="1.0" encoding="utf-8"?>
-<p:sld xmlns:a="http://schemas.openxmlformats.org/drawingml/2006/main" xmlns:p="http://schemas.openxmlformats.org/presentationml/2006/main" xmlns:r="http://schemas.openxmlformats.org/officeDocument/2006/relationships">
+<p:sld xmlns:a="http://schemas.openxmlformats.org/drawingml/2006/main" xmlns:r="http://schemas.openxmlformats.org/officeDocument/2006/relationships" xmlns:p="http://schemas.openxmlformats.org/presentationml/2006/main">
   <p:cSld>
     <p:bg>
       <p:bgPr>
@@ -3099,7 +3094,14 @@
         <p:cNvGrpSpPr/>
         <p:nvPr/>
       </p:nvGrpSpPr>
-      <p:grpSpPr/>
+      <p:grpSpPr>
+        <a:xfrm>
+          <a:off x="0" y="0"/>
+          <a:ext cx="0" cy="0"/>
+          <a:chOff x="0" y="0"/>
+          <a:chExt cx="0" cy="0"/>
+        </a:xfrm>
+      </p:grpSpPr>
       <p:sp>
         <p:nvSpPr>
           <p:cNvPr id="2" name="Rectangle 1"/>
@@ -3140,6 +3142,7 @@
           <a:lstStyle/>
           <a:p>
             <a:pPr algn="ctr"/>
+            <a:endParaRPr/>
           </a:p>
         </p:txBody>
       </p:sp>
@@ -3183,6 +3186,7 @@
           <a:lstStyle/>
           <a:p>
             <a:pPr algn="ctr"/>
+            <a:endParaRPr/>
           </a:p>
         </p:txBody>
       </p:sp>
@@ -3226,6 +3230,7 @@
           <a:lstStyle/>
           <a:p>
             <a:pPr algn="ctr"/>
+            <a:endParaRPr/>
           </a:p>
         </p:txBody>
       </p:sp>
@@ -3269,6 +3274,7 @@
           <a:lstStyle/>
           <a:p>
             <a:pPr algn="ctr"/>
+            <a:endParaRPr/>
           </a:p>
         </p:txBody>
       </p:sp>
@@ -3289,7 +3295,7 @@
           <a:noFill/>
         </p:spPr>
         <p:txBody>
-          <a:bodyPr wrap="square" lIns="0" rIns="0" tIns="0" bIns="0">
+          <a:bodyPr wrap="square" lIns="0" tIns="0" rIns="0" bIns="0">
             <a:spAutoFit/>
           </a:bodyPr>
           <a:lstStyle/>
@@ -3324,7 +3330,7 @@
           <a:noFill/>
         </p:spPr>
         <p:txBody>
-          <a:bodyPr wrap="square" lIns="0" rIns="0" tIns="0" bIns="0">
+          <a:bodyPr wrap="square" lIns="0" tIns="0" rIns="0" bIns="0">
             <a:spAutoFit/>
           </a:bodyPr>
           <a:lstStyle/>
@@ -3384,6 +3390,7 @@
           <a:lstStyle/>
           <a:p>
             <a:pPr algn="ctr"/>
+            <a:endParaRPr/>
           </a:p>
         </p:txBody>
       </p:sp>
@@ -3404,7 +3411,7 @@
           <a:noFill/>
         </p:spPr>
         <p:txBody>
-          <a:bodyPr wrap="square" lIns="0" rIns="0" tIns="0" bIns="0">
+          <a:bodyPr wrap="square" lIns="0" tIns="0" rIns="0" bIns="0">
             <a:spAutoFit/>
           </a:bodyPr>
           <a:lstStyle/>
@@ -3439,7 +3446,7 @@
           <a:noFill/>
         </p:spPr>
         <p:txBody>
-          <a:bodyPr wrap="square" lIns="0" rIns="0" tIns="0" bIns="0">
+          <a:bodyPr wrap="square" lIns="0" tIns="0" rIns="0" bIns="0">
             <a:spAutoFit/>
           </a:bodyPr>
           <a:lstStyle/>
@@ -3485,7 +3492,7 @@
           <a:noFill/>
         </p:spPr>
         <p:txBody>
-          <a:bodyPr wrap="square" lIns="0" rIns="0" tIns="0" bIns="0">
+          <a:bodyPr wrap="square" lIns="0" tIns="0" rIns="0" bIns="0">
             <a:spAutoFit/>
           </a:bodyPr>
           <a:lstStyle/>
@@ -3545,6 +3552,7 @@
           <a:lstStyle/>
           <a:p>
             <a:pPr algn="ctr"/>
+            <a:endParaRPr/>
           </a:p>
         </p:txBody>
       </p:sp>
@@ -3565,7 +3573,7 @@
           <a:noFill/>
         </p:spPr>
         <p:txBody>
-          <a:bodyPr wrap="square" lIns="0" rIns="0" tIns="0" bIns="0">
+          <a:bodyPr wrap="square" lIns="0" tIns="0" rIns="0" bIns="0">
             <a:spAutoFit/>
           </a:bodyPr>
           <a:lstStyle/>
@@ -3600,7 +3608,7 @@
           <a:noFill/>
         </p:spPr>
         <p:txBody>
-          <a:bodyPr wrap="square" lIns="0" rIns="0" tIns="0" bIns="0">
+          <a:bodyPr wrap="square" lIns="0" tIns="0" rIns="0" bIns="0">
             <a:spAutoFit/>
           </a:bodyPr>
           <a:lstStyle/>
@@ -3660,6 +3668,7 @@
           <a:lstStyle/>
           <a:p>
             <a:pPr algn="ctr"/>
+            <a:endParaRPr/>
           </a:p>
         </p:txBody>
       </p:sp>
@@ -3680,7 +3689,7 @@
           <a:noFill/>
         </p:spPr>
         <p:txBody>
-          <a:bodyPr wrap="square" lIns="0" rIns="0" tIns="0" bIns="0">
+          <a:bodyPr wrap="square" lIns="0" tIns="0" rIns="0" bIns="0">
             <a:spAutoFit/>
           </a:bodyPr>
           <a:lstStyle/>
@@ -3715,7 +3724,7 @@
           <a:noFill/>
         </p:spPr>
         <p:txBody>
-          <a:bodyPr wrap="square" lIns="0" rIns="0" tIns="0" bIns="0">
+          <a:bodyPr wrap="square" lIns="0" tIns="0" rIns="0" bIns="0">
             <a:spAutoFit/>
           </a:bodyPr>
           <a:lstStyle/>
@@ -3742,7 +3751,7 @@
 </file>
 
 <file path=ppt/slides/slide2.xml><?xml version="1.0" encoding="utf-8"?>
-<p:sld xmlns:a="http://schemas.openxmlformats.org/drawingml/2006/main" xmlns:p="http://schemas.openxmlformats.org/presentationml/2006/main" xmlns:r="http://schemas.openxmlformats.org/officeDocument/2006/relationships">
+<p:sld xmlns:a="http://schemas.openxmlformats.org/drawingml/2006/main" xmlns:r="http://schemas.openxmlformats.org/officeDocument/2006/relationships" xmlns:p="http://schemas.openxmlformats.org/presentationml/2006/main">
   <p:cSld>
     <p:bg>
       <p:bgPr>
@@ -3758,7 +3767,14 @@
         <p:cNvGrpSpPr/>
         <p:nvPr/>
       </p:nvGrpSpPr>
-      <p:grpSpPr/>
+      <p:grpSpPr>
+        <a:xfrm>
+          <a:off x="0" y="0"/>
+          <a:ext cx="0" cy="0"/>
+          <a:chOff x="0" y="0"/>
+          <a:chExt cx="0" cy="0"/>
+        </a:xfrm>
+      </p:grpSpPr>
       <p:sp>
         <p:nvSpPr>
           <p:cNvPr id="2" name="Rectangle 1"/>
@@ -3799,6 +3815,7 @@
           <a:lstStyle/>
           <a:p>
             <a:pPr algn="ctr"/>
+            <a:endParaRPr/>
           </a:p>
         </p:txBody>
       </p:sp>
@@ -3842,6 +3859,7 @@
           <a:lstStyle/>
           <a:p>
             <a:pPr algn="ctr"/>
+            <a:endParaRPr/>
           </a:p>
         </p:txBody>
       </p:sp>
@@ -3862,7 +3880,7 @@
           <a:noFill/>
         </p:spPr>
         <p:txBody>
-          <a:bodyPr wrap="square" lIns="0" rIns="0" tIns="0" bIns="0">
+          <a:bodyPr wrap="square" lIns="0" tIns="0" rIns="0" bIns="0">
             <a:spAutoFit/>
           </a:bodyPr>
           <a:lstStyle/>
@@ -3897,7 +3915,7 @@
           <a:noFill/>
         </p:spPr>
         <p:txBody>
-          <a:bodyPr wrap="square" lIns="0" rIns="0" tIns="0" bIns="0">
+          <a:bodyPr wrap="square" lIns="0" tIns="0" rIns="0" bIns="0">
             <a:spAutoFit/>
           </a:bodyPr>
           <a:lstStyle/>
@@ -3932,7 +3950,7 @@
           <a:noFill/>
         </p:spPr>
         <p:txBody>
-          <a:bodyPr wrap="square" lIns="0" rIns="0" tIns="0" bIns="0">
+          <a:bodyPr wrap="square" lIns="0" tIns="0" rIns="0" bIns="0">
             <a:spAutoFit/>
           </a:bodyPr>
           <a:lstStyle/>
@@ -3992,6 +4010,7 @@
           <a:lstStyle/>
           <a:p>
             <a:pPr algn="ctr"/>
+            <a:endParaRPr/>
           </a:p>
         </p:txBody>
       </p:sp>
@@ -4019,7 +4038,7 @@
           <a:p>
             <a:pPr algn="ctr"/>
             <a:r>
-              <a:rPr b="1" sz="1400">
+              <a:rPr sz="1400" b="1">
                 <a:solidFill>
                   <a:srgbClr val="60A5FA"/>
                 </a:solidFill>
@@ -4046,7 +4065,7 @@
           <a:noFill/>
         </p:spPr>
         <p:txBody>
-          <a:bodyPr wrap="square" lIns="0" rIns="0" tIns="0" bIns="0">
+          <a:bodyPr wrap="square" lIns="0" tIns="0" rIns="0" bIns="0">
             <a:spAutoFit/>
           </a:bodyPr>
           <a:lstStyle/>
@@ -4081,7 +4100,7 @@
           <a:noFill/>
         </p:spPr>
         <p:txBody>
-          <a:bodyPr wrap="square" lIns="0" rIns="0" tIns="0" bIns="0">
+          <a:bodyPr wrap="square" lIns="0" tIns="0" rIns="0" bIns="0">
             <a:spAutoFit/>
           </a:bodyPr>
           <a:lstStyle/>
@@ -4139,6 +4158,7 @@
           <a:lstStyle/>
           <a:p>
             <a:pPr algn="ctr"/>
+            <a:endParaRPr/>
           </a:p>
         </p:txBody>
       </p:sp>
@@ -4184,6 +4204,7 @@
           <a:lstStyle/>
           <a:p>
             <a:pPr algn="ctr"/>
+            <a:endParaRPr/>
           </a:p>
         </p:txBody>
       </p:sp>
@@ -4211,7 +4232,7 @@
           <a:p>
             <a:pPr algn="ctr"/>
             <a:r>
-              <a:rPr b="1" sz="1400">
+              <a:rPr sz="1400" b="1">
                 <a:solidFill>
                   <a:srgbClr val="22D3EE"/>
                 </a:solidFill>
@@ -4238,7 +4259,7 @@
           <a:noFill/>
         </p:spPr>
         <p:txBody>
-          <a:bodyPr wrap="square" lIns="0" rIns="0" tIns="0" bIns="0">
+          <a:bodyPr wrap="square" lIns="0" tIns="0" rIns="0" bIns="0">
             <a:spAutoFit/>
           </a:bodyPr>
           <a:lstStyle/>
@@ -4273,7 +4294,7 @@
           <a:noFill/>
         </p:spPr>
         <p:txBody>
-          <a:bodyPr wrap="square" lIns="0" rIns="0" tIns="0" bIns="0">
+          <a:bodyPr wrap="square" lIns="0" tIns="0" rIns="0" bIns="0">
             <a:spAutoFit/>
           </a:bodyPr>
           <a:lstStyle/>
@@ -4331,6 +4352,7 @@
           <a:lstStyle/>
           <a:p>
             <a:pPr algn="ctr"/>
+            <a:endParaRPr/>
           </a:p>
         </p:txBody>
       </p:sp>
@@ -4376,6 +4398,7 @@
           <a:lstStyle/>
           <a:p>
             <a:pPr algn="ctr"/>
+            <a:endParaRPr/>
           </a:p>
         </p:txBody>
       </p:sp>
@@ -4403,7 +4426,7 @@
           <a:p>
             <a:pPr algn="ctr"/>
             <a:r>
-              <a:rPr b="1" sz="1400">
+              <a:rPr sz="1400" b="1">
                 <a:solidFill>
                   <a:srgbClr val="34D399"/>
                 </a:solidFill>
@@ -4430,7 +4453,7 @@
           <a:noFill/>
         </p:spPr>
         <p:txBody>
-          <a:bodyPr wrap="square" lIns="0" rIns="0" tIns="0" bIns="0">
+          <a:bodyPr wrap="square" lIns="0" tIns="0" rIns="0" bIns="0">
             <a:spAutoFit/>
           </a:bodyPr>
           <a:lstStyle/>
@@ -4465,7 +4488,7 @@
           <a:noFill/>
         </p:spPr>
         <p:txBody>
-          <a:bodyPr wrap="square" lIns="0" rIns="0" tIns="0" bIns="0">
+          <a:bodyPr wrap="square" lIns="0" tIns="0" rIns="0" bIns="0">
             <a:spAutoFit/>
           </a:bodyPr>
           <a:lstStyle/>
@@ -4523,6 +4546,7 @@
           <a:lstStyle/>
           <a:p>
             <a:pPr algn="ctr"/>
+            <a:endParaRPr/>
           </a:p>
         </p:txBody>
       </p:sp>
@@ -4568,6 +4592,7 @@
           <a:lstStyle/>
           <a:p>
             <a:pPr algn="ctr"/>
+            <a:endParaRPr/>
           </a:p>
         </p:txBody>
       </p:sp>
@@ -4595,7 +4620,7 @@
           <a:p>
             <a:pPr algn="ctr"/>
             <a:r>
-              <a:rPr b="1" sz="1400">
+              <a:rPr sz="1400" b="1">
                 <a:solidFill>
                   <a:srgbClr val="8B5CF6"/>
                 </a:solidFill>
@@ -4622,7 +4647,7 @@
           <a:noFill/>
         </p:spPr>
         <p:txBody>
-          <a:bodyPr wrap="square" lIns="0" rIns="0" tIns="0" bIns="0">
+          <a:bodyPr wrap="square" lIns="0" tIns="0" rIns="0" bIns="0">
             <a:spAutoFit/>
           </a:bodyPr>
           <a:lstStyle/>
@@ -4657,7 +4682,7 @@
           <a:noFill/>
         </p:spPr>
         <p:txBody>
-          <a:bodyPr wrap="square" lIns="0" rIns="0" tIns="0" bIns="0">
+          <a:bodyPr wrap="square" lIns="0" tIns="0" rIns="0" bIns="0">
             <a:spAutoFit/>
           </a:bodyPr>
           <a:lstStyle/>
@@ -4715,6 +4740,7 @@
           <a:lstStyle/>
           <a:p>
             <a:pPr algn="ctr"/>
+            <a:endParaRPr/>
           </a:p>
         </p:txBody>
       </p:sp>
@@ -4760,6 +4786,7 @@
           <a:lstStyle/>
           <a:p>
             <a:pPr algn="ctr"/>
+            <a:endParaRPr/>
           </a:p>
         </p:txBody>
       </p:sp>
@@ -4787,7 +4814,7 @@
           <a:p>
             <a:pPr algn="ctr"/>
             <a:r>
-              <a:rPr b="1" sz="1400">
+              <a:rPr sz="1400" b="1">
                 <a:solidFill>
                   <a:srgbClr val="FBBF24"/>
                 </a:solidFill>
@@ -4814,7 +4841,7 @@
           <a:noFill/>
         </p:spPr>
         <p:txBody>
-          <a:bodyPr wrap="square" lIns="0" rIns="0" tIns="0" bIns="0">
+          <a:bodyPr wrap="square" lIns="0" tIns="0" rIns="0" bIns="0">
             <a:spAutoFit/>
           </a:bodyPr>
           <a:lstStyle/>
@@ -4849,7 +4876,7 @@
           <a:noFill/>
         </p:spPr>
         <p:txBody>
-          <a:bodyPr wrap="square" lIns="0" rIns="0" tIns="0" bIns="0">
+          <a:bodyPr wrap="square" lIns="0" tIns="0" rIns="0" bIns="0">
             <a:spAutoFit/>
           </a:bodyPr>
           <a:lstStyle/>
@@ -4876,7 +4903,7 @@
 </file>
 
 <file path=ppt/slides/slide3.xml><?xml version="1.0" encoding="utf-8"?>
-<p:sld xmlns:a="http://schemas.openxmlformats.org/drawingml/2006/main" xmlns:p="http://schemas.openxmlformats.org/presentationml/2006/main" xmlns:r="http://schemas.openxmlformats.org/officeDocument/2006/relationships">
+<p:sld xmlns:a="http://schemas.openxmlformats.org/drawingml/2006/main" xmlns:r="http://schemas.openxmlformats.org/officeDocument/2006/relationships" xmlns:p="http://schemas.openxmlformats.org/presentationml/2006/main">
   <p:cSld>
     <p:bg>
       <p:bgPr>
@@ -4892,7 +4919,14 @@
         <p:cNvGrpSpPr/>
         <p:nvPr/>
       </p:nvGrpSpPr>
-      <p:grpSpPr/>
+      <p:grpSpPr>
+        <a:xfrm>
+          <a:off x="0" y="0"/>
+          <a:ext cx="0" cy="0"/>
+          <a:chOff x="0" y="0"/>
+          <a:chExt cx="0" cy="0"/>
+        </a:xfrm>
+      </p:grpSpPr>
       <p:sp>
         <p:nvSpPr>
           <p:cNvPr id="2" name="Rectangle 1"/>
@@ -4933,6 +4967,7 @@
           <a:lstStyle/>
           <a:p>
             <a:pPr algn="ctr"/>
+            <a:endParaRPr/>
           </a:p>
         </p:txBody>
       </p:sp>
@@ -4976,6 +5011,7 @@
           <a:lstStyle/>
           <a:p>
             <a:pPr algn="ctr"/>
+            <a:endParaRPr/>
           </a:p>
         </p:txBody>
       </p:sp>
@@ -4996,7 +5032,7 @@
           <a:noFill/>
         </p:spPr>
         <p:txBody>
-          <a:bodyPr wrap="square" lIns="0" rIns="0" tIns="0" bIns="0">
+          <a:bodyPr wrap="square" lIns="0" tIns="0" rIns="0" bIns="0">
             <a:spAutoFit/>
           </a:bodyPr>
           <a:lstStyle/>
@@ -5031,7 +5067,7 @@
           <a:noFill/>
         </p:spPr>
         <p:txBody>
-          <a:bodyPr wrap="square" lIns="0" rIns="0" tIns="0" bIns="0">
+          <a:bodyPr wrap="square" lIns="0" tIns="0" rIns="0" bIns="0">
             <a:spAutoFit/>
           </a:bodyPr>
           <a:lstStyle/>
@@ -5091,6 +5127,7 @@
           <a:lstStyle/>
           <a:p>
             <a:pPr algn="ctr"/>
+            <a:endParaRPr/>
           </a:p>
         </p:txBody>
       </p:sp>
@@ -5144,7 +5181,7 @@
           <a:noFill/>
         </p:spPr>
         <p:txBody>
-          <a:bodyPr wrap="square" lIns="0" rIns="0" tIns="0" bIns="0">
+          <a:bodyPr wrap="square" lIns="0" tIns="0" rIns="0" bIns="0">
             <a:spAutoFit/>
           </a:bodyPr>
           <a:lstStyle/>
@@ -5204,6 +5241,7 @@
           <a:lstStyle/>
           <a:p>
             <a:pPr algn="ctr"/>
+            <a:endParaRPr/>
           </a:p>
         </p:txBody>
       </p:sp>
@@ -5257,7 +5295,7 @@
           <a:noFill/>
         </p:spPr>
         <p:txBody>
-          <a:bodyPr wrap="square" lIns="0" rIns="0" tIns="0" bIns="0">
+          <a:bodyPr wrap="square" lIns="0" tIns="0" rIns="0" bIns="0">
             <a:spAutoFit/>
           </a:bodyPr>
           <a:lstStyle/>
@@ -5317,6 +5355,7 @@
           <a:lstStyle/>
           <a:p>
             <a:pPr algn="ctr"/>
+            <a:endParaRPr/>
           </a:p>
         </p:txBody>
       </p:sp>
@@ -5370,7 +5409,7 @@
           <a:noFill/>
         </p:spPr>
         <p:txBody>
-          <a:bodyPr wrap="square" lIns="0" rIns="0" tIns="0" bIns="0">
+          <a:bodyPr wrap="square" lIns="0" tIns="0" rIns="0" bIns="0">
             <a:spAutoFit/>
           </a:bodyPr>
           <a:lstStyle/>
@@ -5430,6 +5469,7 @@
           <a:lstStyle/>
           <a:p>
             <a:pPr algn="ctr"/>
+            <a:endParaRPr/>
           </a:p>
         </p:txBody>
       </p:sp>
@@ -5483,7 +5523,7 @@
           <a:noFill/>
         </p:spPr>
         <p:txBody>
-          <a:bodyPr wrap="square" lIns="0" rIns="0" tIns="0" bIns="0">
+          <a:bodyPr wrap="square" lIns="0" tIns="0" rIns="0" bIns="0">
             <a:spAutoFit/>
           </a:bodyPr>
           <a:lstStyle/>
@@ -5543,6 +5583,7 @@
           <a:lstStyle/>
           <a:p>
             <a:pPr algn="ctr"/>
+            <a:endParaRPr/>
           </a:p>
         </p:txBody>
       </p:sp>
@@ -5563,7 +5604,7 @@
           <a:noFill/>
         </p:spPr>
         <p:txBody>
-          <a:bodyPr wrap="square" lIns="0" rIns="0" tIns="0" bIns="0">
+          <a:bodyPr wrap="square" lIns="0" tIns="0" rIns="0" bIns="0">
             <a:spAutoFit/>
           </a:bodyPr>
           <a:lstStyle/>
@@ -5623,6 +5664,7 @@
           <a:lstStyle/>
           <a:p>
             <a:pPr algn="ctr"/>
+            <a:endParaRPr/>
           </a:p>
         </p:txBody>
       </p:sp>
@@ -5643,7 +5685,7 @@
           <a:noFill/>
         </p:spPr>
         <p:txBody>
-          <a:bodyPr wrap="square" lIns="0" rIns="0" tIns="0" bIns="0">
+          <a:bodyPr wrap="square" lIns="0" tIns="0" rIns="0" bIns="0">
             <a:spAutoFit/>
           </a:bodyPr>
           <a:lstStyle/>
@@ -5703,6 +5745,7 @@
           <a:lstStyle/>
           <a:p>
             <a:pPr algn="ctr"/>
+            <a:endParaRPr/>
           </a:p>
         </p:txBody>
       </p:sp>
@@ -5723,7 +5766,7 @@
           <a:noFill/>
         </p:spPr>
         <p:txBody>
-          <a:bodyPr wrap="square" lIns="0" rIns="0" tIns="0" bIns="0">
+          <a:bodyPr wrap="square" lIns="0" tIns="0" rIns="0" bIns="0">
             <a:spAutoFit/>
           </a:bodyPr>
           <a:lstStyle/>
@@ -5783,6 +5826,7 @@
           <a:lstStyle/>
           <a:p>
             <a:pPr algn="ctr"/>
+            <a:endParaRPr/>
           </a:p>
         </p:txBody>
       </p:sp>
@@ -5803,7 +5847,7 @@
           <a:noFill/>
         </p:spPr>
         <p:txBody>
-          <a:bodyPr wrap="square" lIns="0" rIns="0" tIns="0" bIns="0">
+          <a:bodyPr wrap="square" lIns="0" tIns="0" rIns="0" bIns="0">
             <a:spAutoFit/>
           </a:bodyPr>
           <a:lstStyle/>
@@ -5863,6 +5907,7 @@
           <a:lstStyle/>
           <a:p>
             <a:pPr algn="ctr"/>
+            <a:endParaRPr/>
           </a:p>
         </p:txBody>
       </p:sp>
@@ -5883,7 +5928,7 @@
           <a:noFill/>
         </p:spPr>
         <p:txBody>
-          <a:bodyPr wrap="square" lIns="0" rIns="0" tIns="0" bIns="0">
+          <a:bodyPr wrap="square" lIns="0" tIns="0" rIns="0" bIns="0">
             <a:spAutoFit/>
           </a:bodyPr>
           <a:lstStyle/>
@@ -5918,7 +5963,7 @@
           <a:noFill/>
         </p:spPr>
         <p:txBody>
-          <a:bodyPr wrap="square" lIns="0" rIns="0" tIns="0" bIns="0">
+          <a:bodyPr wrap="square" lIns="0" tIns="0" rIns="0" bIns="0">
             <a:spAutoFit/>
           </a:bodyPr>
           <a:lstStyle/>
@@ -5978,6 +6023,7 @@
           <a:lstStyle/>
           <a:p>
             <a:pPr algn="ctr"/>
+            <a:endParaRPr/>
           </a:p>
         </p:txBody>
       </p:sp>
@@ -5998,7 +6044,7 @@
           <a:noFill/>
         </p:spPr>
         <p:txBody>
-          <a:bodyPr wrap="square" lIns="0" rIns="0" tIns="0" bIns="0">
+          <a:bodyPr wrap="square" lIns="0" tIns="0" rIns="0" bIns="0">
             <a:spAutoFit/>
           </a:bodyPr>
           <a:lstStyle/>
@@ -6033,7 +6079,7 @@
           <a:noFill/>
         </p:spPr>
         <p:txBody>
-          <a:bodyPr wrap="square" lIns="0" rIns="0" tIns="0" bIns="0">
+          <a:bodyPr wrap="square" lIns="0" tIns="0" rIns="0" bIns="0">
             <a:spAutoFit/>
           </a:bodyPr>
           <a:lstStyle/>
@@ -6093,6 +6139,7 @@
           <a:lstStyle/>
           <a:p>
             <a:pPr algn="ctr"/>
+            <a:endParaRPr/>
           </a:p>
         </p:txBody>
       </p:sp>
@@ -6113,7 +6160,7 @@
           <a:noFill/>
         </p:spPr>
         <p:txBody>
-          <a:bodyPr wrap="square" lIns="0" rIns="0" tIns="0" bIns="0">
+          <a:bodyPr wrap="square" lIns="0" tIns="0" rIns="0" bIns="0">
             <a:spAutoFit/>
           </a:bodyPr>
           <a:lstStyle/>
@@ -6148,7 +6195,7 @@
           <a:noFill/>
         </p:spPr>
         <p:txBody>
-          <a:bodyPr wrap="square" lIns="0" rIns="0" tIns="0" bIns="0">
+          <a:bodyPr wrap="square" lIns="0" tIns="0" rIns="0" bIns="0">
             <a:spAutoFit/>
           </a:bodyPr>
           <a:lstStyle/>
@@ -6208,6 +6255,7 @@
           <a:lstStyle/>
           <a:p>
             <a:pPr algn="ctr"/>
+            <a:endParaRPr/>
           </a:p>
         </p:txBody>
       </p:sp>
@@ -6228,7 +6276,7 @@
           <a:noFill/>
         </p:spPr>
         <p:txBody>
-          <a:bodyPr wrap="square" lIns="0" rIns="0" tIns="0" bIns="0">
+          <a:bodyPr wrap="square" lIns="0" tIns="0" rIns="0" bIns="0">
             <a:spAutoFit/>
           </a:bodyPr>
           <a:lstStyle/>
@@ -6255,7 +6303,7 @@
 </file>
 
 <file path=ppt/slides/slide4.xml><?xml version="1.0" encoding="utf-8"?>
-<p:sld xmlns:a="http://schemas.openxmlformats.org/drawingml/2006/main" xmlns:p="http://schemas.openxmlformats.org/presentationml/2006/main" xmlns:r="http://schemas.openxmlformats.org/officeDocument/2006/relationships">
+<p:sld xmlns:a="http://schemas.openxmlformats.org/drawingml/2006/main" xmlns:r="http://schemas.openxmlformats.org/officeDocument/2006/relationships" xmlns:p="http://schemas.openxmlformats.org/presentationml/2006/main">
   <p:cSld>
     <p:bg>
       <p:bgPr>
@@ -6271,7 +6319,14 @@
         <p:cNvGrpSpPr/>
         <p:nvPr/>
       </p:nvGrpSpPr>
-      <p:grpSpPr/>
+      <p:grpSpPr>
+        <a:xfrm>
+          <a:off x="0" y="0"/>
+          <a:ext cx="0" cy="0"/>
+          <a:chOff x="0" y="0"/>
+          <a:chExt cx="0" cy="0"/>
+        </a:xfrm>
+      </p:grpSpPr>
       <p:sp>
         <p:nvSpPr>
           <p:cNvPr id="2" name="Rectangle 1"/>
@@ -6312,6 +6367,7 @@
           <a:lstStyle/>
           <a:p>
             <a:pPr algn="ctr"/>
+            <a:endParaRPr/>
           </a:p>
         </p:txBody>
       </p:sp>
@@ -6355,6 +6411,7 @@
           <a:lstStyle/>
           <a:p>
             <a:pPr algn="ctr"/>
+            <a:endParaRPr/>
           </a:p>
         </p:txBody>
       </p:sp>
@@ -6375,7 +6432,7 @@
           <a:noFill/>
         </p:spPr>
         <p:txBody>
-          <a:bodyPr wrap="square" lIns="0" rIns="0" tIns="0" bIns="0">
+          <a:bodyPr wrap="square" lIns="0" tIns="0" rIns="0" bIns="0">
             <a:spAutoFit/>
           </a:bodyPr>
           <a:lstStyle/>
@@ -6410,7 +6467,7 @@
           <a:noFill/>
         </p:spPr>
         <p:txBody>
-          <a:bodyPr wrap="square" lIns="0" rIns="0" tIns="0" bIns="0">
+          <a:bodyPr wrap="square" lIns="0" tIns="0" rIns="0" bIns="0">
             <a:spAutoFit/>
           </a:bodyPr>
           <a:lstStyle/>
@@ -6470,6 +6527,7 @@
           <a:lstStyle/>
           <a:p>
             <a:pPr algn="ctr"/>
+            <a:endParaRPr/>
           </a:p>
         </p:txBody>
       </p:sp>
@@ -6513,6 +6571,7 @@
           <a:lstStyle/>
           <a:p>
             <a:pPr algn="ctr"/>
+            <a:endParaRPr/>
           </a:p>
         </p:txBody>
       </p:sp>
@@ -6533,7 +6592,7 @@
           <a:noFill/>
         </p:spPr>
         <p:txBody>
-          <a:bodyPr wrap="square" lIns="0" rIns="0" tIns="0" bIns="0">
+          <a:bodyPr wrap="square" lIns="0" tIns="0" rIns="0" bIns="0">
             <a:spAutoFit/>
           </a:bodyPr>
           <a:lstStyle/>
@@ -6568,7 +6627,7 @@
           <a:noFill/>
         </p:spPr>
         <p:txBody>
-          <a:bodyPr wrap="square" lIns="0" rIns="0" tIns="0" bIns="0">
+          <a:bodyPr wrap="square" lIns="0" tIns="0" rIns="0" bIns="0">
             <a:spAutoFit/>
           </a:bodyPr>
           <a:lstStyle/>
@@ -6603,7 +6662,7 @@
           <a:noFill/>
         </p:spPr>
         <p:txBody>
-          <a:bodyPr wrap="square" lIns="0" rIns="0" tIns="0" bIns="0">
+          <a:bodyPr wrap="square" lIns="0" tIns="0" rIns="0" bIns="0">
             <a:spAutoFit/>
           </a:bodyPr>
           <a:lstStyle/>
@@ -6663,6 +6722,7 @@
           <a:lstStyle/>
           <a:p>
             <a:pPr algn="ctr"/>
+            <a:endParaRPr/>
           </a:p>
         </p:txBody>
       </p:sp>
@@ -6706,6 +6766,7 @@
           <a:lstStyle/>
           <a:p>
             <a:pPr algn="ctr"/>
+            <a:endParaRPr/>
           </a:p>
         </p:txBody>
       </p:sp>
@@ -6726,7 +6787,7 @@
           <a:noFill/>
         </p:spPr>
         <p:txBody>
-          <a:bodyPr wrap="square" lIns="0" rIns="0" tIns="0" bIns="0">
+          <a:bodyPr wrap="square" lIns="0" tIns="0" rIns="0" bIns="0">
             <a:spAutoFit/>
           </a:bodyPr>
           <a:lstStyle/>
@@ -6761,7 +6822,7 @@
           <a:noFill/>
         </p:spPr>
         <p:txBody>
-          <a:bodyPr wrap="square" lIns="0" rIns="0" tIns="0" bIns="0">
+          <a:bodyPr wrap="square" lIns="0" tIns="0" rIns="0" bIns="0">
             <a:spAutoFit/>
           </a:bodyPr>
           <a:lstStyle/>
@@ -6796,7 +6857,7 @@
           <a:noFill/>
         </p:spPr>
         <p:txBody>
-          <a:bodyPr wrap="square" lIns="0" rIns="0" tIns="0" bIns="0">
+          <a:bodyPr wrap="square" lIns="0" tIns="0" rIns="0" bIns="0">
             <a:spAutoFit/>
           </a:bodyPr>
           <a:lstStyle/>
@@ -6856,6 +6917,7 @@
           <a:lstStyle/>
           <a:p>
             <a:pPr algn="ctr"/>
+            <a:endParaRPr/>
           </a:p>
         </p:txBody>
       </p:sp>
@@ -6899,6 +6961,7 @@
           <a:lstStyle/>
           <a:p>
             <a:pPr algn="ctr"/>
+            <a:endParaRPr/>
           </a:p>
         </p:txBody>
       </p:sp>
@@ -6919,7 +6982,7 @@
           <a:noFill/>
         </p:spPr>
         <p:txBody>
-          <a:bodyPr wrap="square" lIns="0" rIns="0" tIns="0" bIns="0">
+          <a:bodyPr wrap="square" lIns="0" tIns="0" rIns="0" bIns="0">
             <a:spAutoFit/>
           </a:bodyPr>
           <a:lstStyle/>
@@ -6954,7 +7017,7 @@
           <a:noFill/>
         </p:spPr>
         <p:txBody>
-          <a:bodyPr wrap="square" lIns="0" rIns="0" tIns="0" bIns="0">
+          <a:bodyPr wrap="square" lIns="0" tIns="0" rIns="0" bIns="0">
             <a:spAutoFit/>
           </a:bodyPr>
           <a:lstStyle/>
@@ -6989,7 +7052,7 @@
           <a:noFill/>
         </p:spPr>
         <p:txBody>
-          <a:bodyPr wrap="square" lIns="0" rIns="0" tIns="0" bIns="0">
+          <a:bodyPr wrap="square" lIns="0" tIns="0" rIns="0" bIns="0">
             <a:spAutoFit/>
           </a:bodyPr>
           <a:lstStyle/>
@@ -7049,6 +7112,7 @@
           <a:lstStyle/>
           <a:p>
             <a:pPr algn="ctr"/>
+            <a:endParaRPr/>
           </a:p>
         </p:txBody>
       </p:sp>
@@ -7092,6 +7156,7 @@
           <a:lstStyle/>
           <a:p>
             <a:pPr algn="ctr"/>
+            <a:endParaRPr/>
           </a:p>
         </p:txBody>
       </p:sp>
@@ -7112,7 +7177,7 @@
           <a:noFill/>
         </p:spPr>
         <p:txBody>
-          <a:bodyPr wrap="square" lIns="0" rIns="0" tIns="0" bIns="0">
+          <a:bodyPr wrap="square" lIns="0" tIns="0" rIns="0" bIns="0">
             <a:spAutoFit/>
           </a:bodyPr>
           <a:lstStyle/>
@@ -7147,7 +7212,7 @@
           <a:noFill/>
         </p:spPr>
         <p:txBody>
-          <a:bodyPr wrap="square" lIns="0" rIns="0" tIns="0" bIns="0">
+          <a:bodyPr wrap="square" lIns="0" tIns="0" rIns="0" bIns="0">
             <a:spAutoFit/>
           </a:bodyPr>
           <a:lstStyle/>
@@ -7182,7 +7247,7 @@
           <a:noFill/>
         </p:spPr>
         <p:txBody>
-          <a:bodyPr wrap="square" lIns="0" rIns="0" tIns="0" bIns="0">
+          <a:bodyPr wrap="square" lIns="0" tIns="0" rIns="0" bIns="0">
             <a:spAutoFit/>
           </a:bodyPr>
           <a:lstStyle/>
@@ -7209,7 +7274,7 @@
 </file>
 
 <file path=ppt/slides/slide5.xml><?xml version="1.0" encoding="utf-8"?>
-<p:sld xmlns:a="http://schemas.openxmlformats.org/drawingml/2006/main" xmlns:p="http://schemas.openxmlformats.org/presentationml/2006/main" xmlns:r="http://schemas.openxmlformats.org/officeDocument/2006/relationships">
+<p:sld xmlns:a="http://schemas.openxmlformats.org/drawingml/2006/main" xmlns:r="http://schemas.openxmlformats.org/officeDocument/2006/relationships" xmlns:p="http://schemas.openxmlformats.org/presentationml/2006/main">
   <p:cSld>
     <p:bg>
       <p:bgPr>
@@ -7225,7 +7290,14 @@
         <p:cNvGrpSpPr/>
         <p:nvPr/>
       </p:nvGrpSpPr>
-      <p:grpSpPr/>
+      <p:grpSpPr>
+        <a:xfrm>
+          <a:off x="0" y="0"/>
+          <a:ext cx="0" cy="0"/>
+          <a:chOff x="0" y="0"/>
+          <a:chExt cx="0" cy="0"/>
+        </a:xfrm>
+      </p:grpSpPr>
       <p:sp>
         <p:nvSpPr>
           <p:cNvPr id="2" name="Rectangle 1"/>
@@ -7266,6 +7338,7 @@
           <a:lstStyle/>
           <a:p>
             <a:pPr algn="ctr"/>
+            <a:endParaRPr/>
           </a:p>
         </p:txBody>
       </p:sp>
@@ -7309,6 +7382,7 @@
           <a:lstStyle/>
           <a:p>
             <a:pPr algn="ctr"/>
+            <a:endParaRPr/>
           </a:p>
         </p:txBody>
       </p:sp>
@@ -7329,7 +7403,7 @@
           <a:noFill/>
         </p:spPr>
         <p:txBody>
-          <a:bodyPr wrap="square" lIns="0" rIns="0" tIns="0" bIns="0">
+          <a:bodyPr wrap="square" lIns="0" tIns="0" rIns="0" bIns="0">
             <a:spAutoFit/>
           </a:bodyPr>
           <a:lstStyle/>
@@ -7364,7 +7438,7 @@
           <a:noFill/>
         </p:spPr>
         <p:txBody>
-          <a:bodyPr wrap="square" lIns="0" rIns="0" tIns="0" bIns="0">
+          <a:bodyPr wrap="square" lIns="0" tIns="0" rIns="0" bIns="0">
             <a:spAutoFit/>
           </a:bodyPr>
           <a:lstStyle/>
@@ -7424,6 +7498,7 @@
           <a:lstStyle/>
           <a:p>
             <a:pPr algn="ctr"/>
+            <a:endParaRPr/>
           </a:p>
         </p:txBody>
       </p:sp>
@@ -7444,7 +7519,7 @@
           <a:noFill/>
         </p:spPr>
         <p:txBody>
-          <a:bodyPr wrap="square" lIns="0" rIns="0" tIns="0" bIns="0">
+          <a:bodyPr wrap="square" lIns="0" tIns="0" rIns="0" bIns="0">
             <a:spAutoFit/>
           </a:bodyPr>
           <a:lstStyle/>
@@ -7479,7 +7554,7 @@
           <a:noFill/>
         </p:spPr>
         <p:txBody>
-          <a:bodyPr wrap="square" lIns="0" rIns="0" tIns="0" bIns="0">
+          <a:bodyPr wrap="square" lIns="0" tIns="0" rIns="0" bIns="0">
             <a:spAutoFit/>
           </a:bodyPr>
           <a:lstStyle/>
@@ -7539,6 +7614,7 @@
           <a:lstStyle/>
           <a:p>
             <a:pPr algn="ctr"/>
+            <a:endParaRPr/>
           </a:p>
         </p:txBody>
       </p:sp>
@@ -7559,7 +7635,7 @@
           <a:noFill/>
         </p:spPr>
         <p:txBody>
-          <a:bodyPr wrap="square" lIns="0" rIns="0" tIns="0" bIns="0">
+          <a:bodyPr wrap="square" lIns="0" tIns="0" rIns="0" bIns="0">
             <a:spAutoFit/>
           </a:bodyPr>
           <a:lstStyle/>
@@ -7594,7 +7670,7 @@
           <a:noFill/>
         </p:spPr>
         <p:txBody>
-          <a:bodyPr wrap="square" lIns="0" rIns="0" tIns="0" bIns="0">
+          <a:bodyPr wrap="square" lIns="0" tIns="0" rIns="0" bIns="0">
             <a:spAutoFit/>
           </a:bodyPr>
           <a:lstStyle/>
@@ -7654,6 +7730,7 @@
           <a:lstStyle/>
           <a:p>
             <a:pPr algn="ctr"/>
+            <a:endParaRPr/>
           </a:p>
         </p:txBody>
       </p:sp>
@@ -7674,7 +7751,7 @@
           <a:noFill/>
         </p:spPr>
         <p:txBody>
-          <a:bodyPr wrap="square" lIns="0" rIns="0" tIns="0" bIns="0">
+          <a:bodyPr wrap="square" lIns="0" tIns="0" rIns="0" bIns="0">
             <a:spAutoFit/>
           </a:bodyPr>
           <a:lstStyle/>
@@ -7709,7 +7786,7 @@
           <a:noFill/>
         </p:spPr>
         <p:txBody>
-          <a:bodyPr wrap="square" lIns="0" rIns="0" tIns="0" bIns="0">
+          <a:bodyPr wrap="square" lIns="0" tIns="0" rIns="0" bIns="0">
             <a:spAutoFit/>
           </a:bodyPr>
           <a:lstStyle/>
@@ -7744,7 +7821,7 @@
           <a:noFill/>
         </p:spPr>
         <p:txBody>
-          <a:bodyPr wrap="square" lIns="0" rIns="0" tIns="0" bIns="0">
+          <a:bodyPr wrap="square" lIns="0" tIns="0" rIns="0" bIns="0">
             <a:spAutoFit/>
           </a:bodyPr>
           <a:lstStyle/>
@@ -7779,7 +7856,7 @@
           <a:noFill/>
         </p:spPr>
         <p:txBody>
-          <a:bodyPr wrap="square" lIns="0" rIns="0" tIns="0" bIns="0">
+          <a:bodyPr wrap="square" lIns="0" tIns="0" rIns="0" bIns="0">
             <a:spAutoFit/>
           </a:bodyPr>
           <a:lstStyle/>
@@ -8123,4 +8200,10 @@
   </a:objectDefaults>
   <a:extraClrSchemeLst/>
 </a:theme>
+</file>
+
+<file path=docMetadata/LabelInfo.xml><?xml version="1.0" encoding="utf-8"?>
+<clbl:labelList xmlns:clbl="http://schemas.microsoft.com/office/2020/mipLabelMetadata">
+  <clbl:label id="{bb5d96ea-ab39-44a0-a6d6-b6f0aac5958b}" enabled="1" method="Privileged" siteId="{76a2ae5a-9f00-4f6b-95ed-5d33d77c4d61}" contentBits="0" removed="0"/>
+</clbl:labelList>
 </file>